--- a/Hosanna (Praise is Rising)-CH.pptx
+++ b/Hosanna (Praise is Rising)-CH.pptx
@@ -10,8 +10,13 @@
     <p:sldId id="259" r:id="rId4"/>
     <p:sldId id="261" r:id="rId5"/>
     <p:sldId id="263" r:id="rId6"/>
-    <p:sldId id="264" r:id="rId7"/>
-    <p:sldId id="262" r:id="rId8"/>
+    <p:sldId id="266" r:id="rId7"/>
+    <p:sldId id="264" r:id="rId8"/>
+    <p:sldId id="262" r:id="rId9"/>
+    <p:sldId id="267" r:id="rId10"/>
+    <p:sldId id="270" r:id="rId11"/>
+    <p:sldId id="268" r:id="rId12"/>
+    <p:sldId id="269" r:id="rId13"/>
   </p:sldIdLst>
   <p:sldSz cx="12192000" cy="6858000"/>
   <p:notesSz cx="6858000" cy="9144000"/>
@@ -265,7 +270,7 @@
           <a:p>
             <a:fld id="{5448A3D2-9408-4143-A73F-7F223505335E}" type="datetimeFigureOut">
               <a:rPr lang="en-US" smtClean="0"/>
-              <a:t>6/20/26</a:t>
+              <a:t>7/11/26</a:t>
             </a:fld>
             <a:endParaRPr lang="en-US"/>
           </a:p>
@@ -463,7 +468,7 @@
           <a:p>
             <a:fld id="{5448A3D2-9408-4143-A73F-7F223505335E}" type="datetimeFigureOut">
               <a:rPr lang="en-US" smtClean="0"/>
-              <a:t>6/20/26</a:t>
+              <a:t>7/11/26</a:t>
             </a:fld>
             <a:endParaRPr lang="en-US"/>
           </a:p>
@@ -671,7 +676,7 @@
           <a:p>
             <a:fld id="{5448A3D2-9408-4143-A73F-7F223505335E}" type="datetimeFigureOut">
               <a:rPr lang="en-US" smtClean="0"/>
-              <a:t>6/20/26</a:t>
+              <a:t>7/11/26</a:t>
             </a:fld>
             <a:endParaRPr lang="en-US"/>
           </a:p>
@@ -869,7 +874,7 @@
           <a:p>
             <a:fld id="{5448A3D2-9408-4143-A73F-7F223505335E}" type="datetimeFigureOut">
               <a:rPr lang="en-US" smtClean="0"/>
-              <a:t>6/20/26</a:t>
+              <a:t>7/11/26</a:t>
             </a:fld>
             <a:endParaRPr lang="en-US"/>
           </a:p>
@@ -1144,7 +1149,7 @@
           <a:p>
             <a:fld id="{5448A3D2-9408-4143-A73F-7F223505335E}" type="datetimeFigureOut">
               <a:rPr lang="en-US" smtClean="0"/>
-              <a:t>6/20/26</a:t>
+              <a:t>7/11/26</a:t>
             </a:fld>
             <a:endParaRPr lang="en-US"/>
           </a:p>
@@ -1409,7 +1414,7 @@
           <a:p>
             <a:fld id="{5448A3D2-9408-4143-A73F-7F223505335E}" type="datetimeFigureOut">
               <a:rPr lang="en-US" smtClean="0"/>
-              <a:t>6/20/26</a:t>
+              <a:t>7/11/26</a:t>
             </a:fld>
             <a:endParaRPr lang="en-US"/>
           </a:p>
@@ -1821,7 +1826,7 @@
           <a:p>
             <a:fld id="{5448A3D2-9408-4143-A73F-7F223505335E}" type="datetimeFigureOut">
               <a:rPr lang="en-US" smtClean="0"/>
-              <a:t>6/20/26</a:t>
+              <a:t>7/11/26</a:t>
             </a:fld>
             <a:endParaRPr lang="en-US"/>
           </a:p>
@@ -1962,7 +1967,7 @@
           <a:p>
             <a:fld id="{5448A3D2-9408-4143-A73F-7F223505335E}" type="datetimeFigureOut">
               <a:rPr lang="en-US" smtClean="0"/>
-              <a:t>6/20/26</a:t>
+              <a:t>7/11/26</a:t>
             </a:fld>
             <a:endParaRPr lang="en-US"/>
           </a:p>
@@ -2075,7 +2080,7 @@
           <a:p>
             <a:fld id="{5448A3D2-9408-4143-A73F-7F223505335E}" type="datetimeFigureOut">
               <a:rPr lang="en-US" smtClean="0"/>
-              <a:t>6/20/26</a:t>
+              <a:t>7/11/26</a:t>
             </a:fld>
             <a:endParaRPr lang="en-US"/>
           </a:p>
@@ -2386,7 +2391,7 @@
           <a:p>
             <a:fld id="{5448A3D2-9408-4143-A73F-7F223505335E}" type="datetimeFigureOut">
               <a:rPr lang="en-US" smtClean="0"/>
-              <a:t>6/20/26</a:t>
+              <a:t>7/11/26</a:t>
             </a:fld>
             <a:endParaRPr lang="en-US"/>
           </a:p>
@@ -2674,7 +2679,7 @@
           <a:p>
             <a:fld id="{5448A3D2-9408-4143-A73F-7F223505335E}" type="datetimeFigureOut">
               <a:rPr lang="en-US" smtClean="0"/>
-              <a:t>6/20/26</a:t>
+              <a:t>7/11/26</a:t>
             </a:fld>
             <a:endParaRPr lang="en-US"/>
           </a:p>
@@ -2915,7 +2920,7 @@
           <a:p>
             <a:fld id="{5448A3D2-9408-4143-A73F-7F223505335E}" type="datetimeFigureOut">
               <a:rPr lang="en-US" smtClean="0"/>
-              <a:t>6/20/26</a:t>
+              <a:t>7/11/26</a:t>
             </a:fld>
             <a:endParaRPr lang="en-US"/>
           </a:p>
@@ -3402,6 +3407,812 @@
 </p:sld>
 </file>
 
+<file path=ppt/slides/slide10.xml><?xml version="1.0" encoding="utf-8"?>
+<p:sld xmlns:a="http://schemas.openxmlformats.org/drawingml/2006/main" xmlns:r="http://schemas.openxmlformats.org/officeDocument/2006/relationships" xmlns:p="http://schemas.openxmlformats.org/presentationml/2006/main">
+  <p:cSld>
+    <p:bg>
+      <p:bgPr>
+        <a:solidFill>
+          <a:schemeClr val="accent1">
+            <a:lumMod val="75000"/>
+          </a:schemeClr>
+        </a:solidFill>
+        <a:effectLst/>
+      </p:bgPr>
+    </p:bg>
+    <p:spTree>
+      <p:nvGrpSpPr>
+        <p:cNvPr id="1" name="">
+          <a:extLst>
+            <a:ext uri="{FF2B5EF4-FFF2-40B4-BE49-F238E27FC236}">
+              <a16:creationId xmlns:a16="http://schemas.microsoft.com/office/drawing/2014/main" id="{AD02B363-D4DA-8709-AFF7-08C3C47ED235}"/>
+            </a:ext>
+          </a:extLst>
+        </p:cNvPr>
+        <p:cNvGrpSpPr/>
+        <p:nvPr/>
+      </p:nvGrpSpPr>
+      <p:grpSpPr>
+        <a:xfrm>
+          <a:off x="0" y="0"/>
+          <a:ext cx="0" cy="0"/>
+          <a:chOff x="0" y="0"/>
+          <a:chExt cx="0" cy="0"/>
+        </a:xfrm>
+      </p:grpSpPr>
+      <p:sp>
+        <p:nvSpPr>
+          <p:cNvPr id="2" name="Title 1">
+            <a:extLst>
+              <a:ext uri="{FF2B5EF4-FFF2-40B4-BE49-F238E27FC236}">
+                <a16:creationId xmlns:a16="http://schemas.microsoft.com/office/drawing/2014/main" id="{B93CE152-C8C3-6E60-57A1-E8C1287C5246}"/>
+              </a:ext>
+            </a:extLst>
+          </p:cNvPr>
+          <p:cNvSpPr>
+            <a:spLocks noGrp="1"/>
+          </p:cNvSpPr>
+          <p:nvPr>
+            <p:ph type="ctrTitle"/>
+          </p:nvPr>
+        </p:nvSpPr>
+        <p:spPr>
+          <a:xfrm>
+            <a:off x="0" y="22612"/>
+            <a:ext cx="12192000" cy="953572"/>
+          </a:xfrm>
+        </p:spPr>
+        <p:txBody>
+          <a:bodyPr>
+            <a:normAutofit/>
+          </a:bodyPr>
+          <a:lstStyle/>
+          <a:p>
+            <a:pPr algn="l"/>
+            <a:r>
+              <a:rPr lang="en-US" sz="4800" dirty="0">
+                <a:solidFill>
+                  <a:schemeClr val="bg1"/>
+                </a:solidFill>
+                <a:latin typeface="Avenir Book" panose="02000503020000020003" pitchFamily="2" charset="0"/>
+              </a:rPr>
+              <a:t>Pre-Chorus</a:t>
+            </a:r>
+          </a:p>
+        </p:txBody>
+      </p:sp>
+      <p:sp>
+        <p:nvSpPr>
+          <p:cNvPr id="3" name="Subtitle 2">
+            <a:extLst>
+              <a:ext uri="{FF2B5EF4-FFF2-40B4-BE49-F238E27FC236}">
+                <a16:creationId xmlns:a16="http://schemas.microsoft.com/office/drawing/2014/main" id="{0A35B3E8-70E2-CE39-012C-8C5B0E8D4B45}"/>
+              </a:ext>
+            </a:extLst>
+          </p:cNvPr>
+          <p:cNvSpPr>
+            <a:spLocks noGrp="1"/>
+          </p:cNvSpPr>
+          <p:nvPr>
+            <p:ph type="subTitle" idx="1"/>
+          </p:nvPr>
+        </p:nvSpPr>
+        <p:spPr>
+          <a:xfrm>
+            <a:off x="356260" y="976184"/>
+            <a:ext cx="11388436" cy="5301047"/>
+          </a:xfrm>
+        </p:spPr>
+        <p:txBody>
+          <a:bodyPr>
+            <a:noAutofit/>
+          </a:bodyPr>
+          <a:lstStyle/>
+          <a:p>
+            <a:pPr algn="l"/>
+            <a:r>
+              <a:rPr lang="en-US" sz="3200" dirty="0">
+                <a:solidFill>
+                  <a:schemeClr val="bg1"/>
+                </a:solidFill>
+                <a:latin typeface="Avenir Book" panose="02000503020000020003" pitchFamily="2" charset="0"/>
+              </a:rPr>
+              <a:t>                           </a:t>
+            </a:r>
+            <a:r>
+              <a:rPr lang="en-US" sz="3200" dirty="0">
+                <a:solidFill>
+                  <a:srgbClr val="FFFF00"/>
+                </a:solidFill>
+                <a:latin typeface="Avenir Book" panose="02000503020000020003" pitchFamily="2" charset="0"/>
+              </a:rPr>
+              <a:t>D</a:t>
+            </a:r>
+          </a:p>
+          <a:p>
+            <a:pPr algn="l"/>
+            <a:r>
+              <a:rPr lang="en-US" sz="3200" dirty="0" err="1">
+                <a:solidFill>
+                  <a:schemeClr val="bg1"/>
+                </a:solidFill>
+                <a:latin typeface="Avenir Book" panose="02000503020000020003" pitchFamily="2" charset="0"/>
+              </a:rPr>
+              <a:t>'Cause</a:t>
+            </a:r>
+            <a:r>
+              <a:rPr lang="en-US" sz="3200" dirty="0">
+                <a:solidFill>
+                  <a:schemeClr val="bg1"/>
+                </a:solidFill>
+                <a:latin typeface="Avenir Book" panose="02000503020000020003" pitchFamily="2" charset="0"/>
+              </a:rPr>
+              <a:t> when we see You</a:t>
+            </a:r>
+          </a:p>
+          <a:p>
+            <a:pPr algn="l"/>
+            <a:r>
+              <a:rPr lang="en-US" sz="3200" dirty="0">
+                <a:solidFill>
+                  <a:schemeClr val="bg1"/>
+                </a:solidFill>
+                <a:latin typeface="Avenir Book" panose="02000503020000020003" pitchFamily="2" charset="0"/>
+              </a:rPr>
+              <a:t>             </a:t>
+            </a:r>
+            <a:r>
+              <a:rPr lang="en-US" sz="3200" dirty="0">
+                <a:solidFill>
+                  <a:srgbClr val="FFFF00"/>
+                </a:solidFill>
+                <a:latin typeface="Avenir Book" panose="02000503020000020003" pitchFamily="2" charset="0"/>
+              </a:rPr>
+              <a:t>C                              G</a:t>
+            </a:r>
+            <a:endParaRPr lang="en-US" sz="3200" dirty="0">
+              <a:solidFill>
+                <a:schemeClr val="bg1"/>
+              </a:solidFill>
+              <a:latin typeface="Avenir Book" panose="02000503020000020003" pitchFamily="2" charset="0"/>
+            </a:endParaRPr>
+          </a:p>
+          <a:p>
+            <a:pPr algn="l"/>
+            <a:r>
+              <a:rPr lang="en-US" sz="3200" dirty="0">
+                <a:solidFill>
+                  <a:schemeClr val="bg1"/>
+                </a:solidFill>
+                <a:latin typeface="Avenir Book" panose="02000503020000020003" pitchFamily="2" charset="0"/>
+              </a:rPr>
+              <a:t>We find strength to face the day</a:t>
+            </a:r>
+          </a:p>
+          <a:p>
+            <a:pPr algn="l"/>
+            <a:r>
+              <a:rPr lang="en-US" sz="3200" dirty="0">
+                <a:solidFill>
+                  <a:schemeClr val="bg1"/>
+                </a:solidFill>
+                <a:latin typeface="Avenir Book" panose="02000503020000020003" pitchFamily="2" charset="0"/>
+              </a:rPr>
+              <a:t>  </a:t>
+            </a:r>
+            <a:r>
+              <a:rPr lang="en-US" sz="3200" dirty="0">
+                <a:solidFill>
+                  <a:srgbClr val="FFFF00"/>
+                </a:solidFill>
+                <a:latin typeface="Avenir Book" panose="02000503020000020003" pitchFamily="2" charset="0"/>
+              </a:rPr>
+              <a:t>                  D</a:t>
+            </a:r>
+            <a:endParaRPr lang="en-US" sz="3200" dirty="0">
+              <a:solidFill>
+                <a:schemeClr val="bg1"/>
+              </a:solidFill>
+              <a:latin typeface="Avenir Book" panose="02000503020000020003" pitchFamily="2" charset="0"/>
+            </a:endParaRPr>
+          </a:p>
+          <a:p>
+            <a:pPr algn="l"/>
+            <a:r>
+              <a:rPr lang="en-US" sz="3200" dirty="0">
+                <a:solidFill>
+                  <a:schemeClr val="bg1"/>
+                </a:solidFill>
+                <a:latin typeface="Avenir Book" panose="02000503020000020003" pitchFamily="2" charset="0"/>
+              </a:rPr>
+              <a:t>And in Your presence </a:t>
+            </a:r>
+          </a:p>
+          <a:p>
+            <a:pPr algn="l"/>
+            <a:r>
+              <a:rPr lang="en-US" sz="3200" dirty="0">
+                <a:solidFill>
+                  <a:srgbClr val="FFFF00"/>
+                </a:solidFill>
+                <a:latin typeface="Avenir Book" panose="02000503020000020003" pitchFamily="2" charset="0"/>
+              </a:rPr>
+              <a:t>           C                           G</a:t>
+            </a:r>
+          </a:p>
+          <a:p>
+            <a:pPr algn="l"/>
+            <a:r>
+              <a:rPr lang="en-US" sz="3200" dirty="0">
+                <a:solidFill>
+                  <a:schemeClr val="bg1"/>
+                </a:solidFill>
+                <a:latin typeface="Avenir Book" panose="02000503020000020003" pitchFamily="2" charset="0"/>
+              </a:rPr>
+              <a:t>All our fears are washed away</a:t>
+            </a:r>
+          </a:p>
+          <a:p>
+            <a:pPr algn="l"/>
+            <a:r>
+              <a:rPr lang="en-US" sz="3200" dirty="0">
+                <a:solidFill>
+                  <a:srgbClr val="FFFF00"/>
+                </a:solidFill>
+                <a:latin typeface="Avenir Book" panose="02000503020000020003" pitchFamily="2" charset="0"/>
+              </a:rPr>
+              <a:t>              D</a:t>
+            </a:r>
+            <a:endParaRPr lang="en-US" sz="3200" dirty="0">
+              <a:solidFill>
+                <a:schemeClr val="bg1"/>
+              </a:solidFill>
+              <a:latin typeface="Avenir Book" panose="02000503020000020003" pitchFamily="2" charset="0"/>
+            </a:endParaRPr>
+          </a:p>
+          <a:p>
+            <a:pPr algn="l"/>
+            <a:r>
+              <a:rPr lang="en-US" sz="3200" dirty="0">
+                <a:solidFill>
+                  <a:schemeClr val="bg1"/>
+                </a:solidFill>
+                <a:latin typeface="Avenir Book" panose="02000503020000020003" pitchFamily="2" charset="0"/>
+              </a:rPr>
+              <a:t>washed  away</a:t>
+            </a:r>
+          </a:p>
+        </p:txBody>
+      </p:sp>
+    </p:spTree>
+    <p:extLst>
+      <p:ext uri="{BB962C8B-B14F-4D97-AF65-F5344CB8AC3E}">
+        <p14:creationId xmlns:p14="http://schemas.microsoft.com/office/powerpoint/2010/main" val="64117844"/>
+      </p:ext>
+    </p:extLst>
+  </p:cSld>
+  <p:clrMapOvr>
+    <a:masterClrMapping/>
+  </p:clrMapOvr>
+</p:sld>
+</file>
+
+<file path=ppt/slides/slide11.xml><?xml version="1.0" encoding="utf-8"?>
+<p:sld xmlns:a="http://schemas.openxmlformats.org/drawingml/2006/main" xmlns:r="http://schemas.openxmlformats.org/officeDocument/2006/relationships" xmlns:p="http://schemas.openxmlformats.org/presentationml/2006/main">
+  <p:cSld>
+    <p:bg>
+      <p:bgPr>
+        <a:solidFill>
+          <a:schemeClr val="tx1"/>
+        </a:solidFill>
+        <a:effectLst/>
+      </p:bgPr>
+    </p:bg>
+    <p:spTree>
+      <p:nvGrpSpPr>
+        <p:cNvPr id="1" name="">
+          <a:extLst>
+            <a:ext uri="{FF2B5EF4-FFF2-40B4-BE49-F238E27FC236}">
+              <a16:creationId xmlns:a16="http://schemas.microsoft.com/office/drawing/2014/main" id="{CB7A8A91-DF8B-60F3-591C-C1550E6D2EBB}"/>
+            </a:ext>
+          </a:extLst>
+        </p:cNvPr>
+        <p:cNvGrpSpPr/>
+        <p:nvPr/>
+      </p:nvGrpSpPr>
+      <p:grpSpPr>
+        <a:xfrm>
+          <a:off x="0" y="0"/>
+          <a:ext cx="0" cy="0"/>
+          <a:chOff x="0" y="0"/>
+          <a:chExt cx="0" cy="0"/>
+        </a:xfrm>
+      </p:grpSpPr>
+      <p:sp>
+        <p:nvSpPr>
+          <p:cNvPr id="2" name="Title 1">
+            <a:extLst>
+              <a:ext uri="{FF2B5EF4-FFF2-40B4-BE49-F238E27FC236}">
+                <a16:creationId xmlns:a16="http://schemas.microsoft.com/office/drawing/2014/main" id="{A18FCADE-3BBE-1EE8-9F2B-B5E4D756D057}"/>
+              </a:ext>
+            </a:extLst>
+          </p:cNvPr>
+          <p:cNvSpPr>
+            <a:spLocks noGrp="1"/>
+          </p:cNvSpPr>
+          <p:nvPr>
+            <p:ph type="ctrTitle"/>
+          </p:nvPr>
+        </p:nvSpPr>
+        <p:spPr>
+          <a:xfrm>
+            <a:off x="0" y="22612"/>
+            <a:ext cx="12192000" cy="953572"/>
+          </a:xfrm>
+        </p:spPr>
+        <p:txBody>
+          <a:bodyPr>
+            <a:normAutofit/>
+          </a:bodyPr>
+          <a:lstStyle/>
+          <a:p>
+            <a:pPr algn="l"/>
+            <a:r>
+              <a:rPr lang="en-US" sz="4800" dirty="0">
+                <a:solidFill>
+                  <a:schemeClr val="bg1"/>
+                </a:solidFill>
+                <a:latin typeface="Avenir Book" panose="02000503020000020003" pitchFamily="2" charset="0"/>
+              </a:rPr>
+              <a:t>Chorus 1</a:t>
+            </a:r>
+          </a:p>
+        </p:txBody>
+      </p:sp>
+      <p:sp>
+        <p:nvSpPr>
+          <p:cNvPr id="3" name="Subtitle 2">
+            <a:extLst>
+              <a:ext uri="{FF2B5EF4-FFF2-40B4-BE49-F238E27FC236}">
+                <a16:creationId xmlns:a16="http://schemas.microsoft.com/office/drawing/2014/main" id="{972EBEB0-8A0D-8AF5-8E71-5A9992AED2FB}"/>
+              </a:ext>
+            </a:extLst>
+          </p:cNvPr>
+          <p:cNvSpPr>
+            <a:spLocks noGrp="1"/>
+          </p:cNvSpPr>
+          <p:nvPr>
+            <p:ph type="subTitle" idx="1"/>
+          </p:nvPr>
+        </p:nvSpPr>
+        <p:spPr>
+          <a:xfrm>
+            <a:off x="356260" y="976184"/>
+            <a:ext cx="11388436" cy="5301047"/>
+          </a:xfrm>
+        </p:spPr>
+        <p:txBody>
+          <a:bodyPr>
+            <a:noAutofit/>
+          </a:bodyPr>
+          <a:lstStyle/>
+          <a:p>
+            <a:pPr algn="l"/>
+            <a:endParaRPr lang="en-US" sz="4000" dirty="0">
+              <a:solidFill>
+                <a:schemeClr val="bg1"/>
+              </a:solidFill>
+              <a:latin typeface="Avenir Book" panose="02000503020000020003" pitchFamily="2" charset="0"/>
+            </a:endParaRPr>
+          </a:p>
+          <a:p>
+            <a:pPr algn="l"/>
+            <a:r>
+              <a:rPr lang="en-US" sz="4000" dirty="0">
+                <a:solidFill>
+                  <a:srgbClr val="FFFF00"/>
+                </a:solidFill>
+                <a:latin typeface="Avenir Book" panose="02000503020000020003" pitchFamily="2" charset="0"/>
+              </a:rPr>
+              <a:t>G             Em        C</a:t>
+            </a:r>
+            <a:r>
+              <a:rPr lang="en-US" sz="4000" dirty="0">
+                <a:solidFill>
+                  <a:schemeClr val="bg1"/>
+                </a:solidFill>
+                <a:latin typeface="Avenir Book" panose="02000503020000020003" pitchFamily="2" charset="0"/>
+              </a:rPr>
+              <a:t> </a:t>
+            </a:r>
+          </a:p>
+          <a:p>
+            <a:pPr algn="l"/>
+            <a:r>
+              <a:rPr lang="en-US" sz="4000" dirty="0">
+                <a:solidFill>
+                  <a:schemeClr val="bg1"/>
+                </a:solidFill>
+                <a:latin typeface="Avenir Book" panose="02000503020000020003" pitchFamily="2" charset="0"/>
+              </a:rPr>
+              <a:t>Hosanna, hosanna </a:t>
+            </a:r>
+          </a:p>
+          <a:p>
+            <a:pPr algn="l"/>
+            <a:r>
+              <a:rPr lang="en-US" sz="4000" dirty="0">
+                <a:solidFill>
+                  <a:srgbClr val="FFFF00"/>
+                </a:solidFill>
+                <a:latin typeface="Avenir Book" panose="02000503020000020003" pitchFamily="2" charset="0"/>
+              </a:rPr>
+              <a:t>                   G             D</a:t>
+            </a:r>
+            <a:r>
+              <a:rPr lang="en-US" sz="4000" dirty="0">
+                <a:solidFill>
+                  <a:schemeClr val="bg1"/>
+                </a:solidFill>
+                <a:latin typeface="Avenir Book" panose="02000503020000020003" pitchFamily="2" charset="0"/>
+              </a:rPr>
+              <a:t>   </a:t>
+            </a:r>
+          </a:p>
+          <a:p>
+            <a:pPr algn="l"/>
+            <a:r>
+              <a:rPr lang="en-US" sz="4000" dirty="0">
+                <a:solidFill>
+                  <a:schemeClr val="bg1"/>
+                </a:solidFill>
+                <a:latin typeface="Avenir Book" panose="02000503020000020003" pitchFamily="2" charset="0"/>
+              </a:rPr>
+              <a:t>You are the God who saves us, </a:t>
+            </a:r>
+          </a:p>
+          <a:p>
+            <a:pPr algn="l"/>
+            <a:r>
+              <a:rPr lang="en-US" sz="4000" dirty="0">
+                <a:solidFill>
+                  <a:schemeClr val="bg1"/>
+                </a:solidFill>
+                <a:latin typeface="Avenir Book" panose="02000503020000020003" pitchFamily="2" charset="0"/>
+              </a:rPr>
+              <a:t> </a:t>
+            </a:r>
+            <a:r>
+              <a:rPr lang="en-US" sz="4000" dirty="0">
+                <a:solidFill>
+                  <a:srgbClr val="FFFF00"/>
+                </a:solidFill>
+                <a:latin typeface="Avenir Book" panose="02000503020000020003" pitchFamily="2" charset="0"/>
+              </a:rPr>
+              <a:t>               Em                C</a:t>
+            </a:r>
+            <a:r>
+              <a:rPr lang="en-US" sz="4000" dirty="0">
+                <a:solidFill>
+                  <a:schemeClr val="bg1"/>
+                </a:solidFill>
+                <a:latin typeface="Avenir Book" panose="02000503020000020003" pitchFamily="2" charset="0"/>
+              </a:rPr>
+              <a:t> </a:t>
+            </a:r>
+          </a:p>
+          <a:p>
+            <a:pPr algn="l"/>
+            <a:r>
+              <a:rPr lang="en-US" sz="4000" dirty="0">
+                <a:solidFill>
+                  <a:schemeClr val="bg1"/>
+                </a:solidFill>
+                <a:latin typeface="Avenir Book" panose="02000503020000020003" pitchFamily="2" charset="0"/>
+              </a:rPr>
+              <a:t>worthy of all our praises</a:t>
+            </a:r>
+          </a:p>
+          <a:p>
+            <a:pPr algn="l"/>
+            <a:endParaRPr lang="en-US" sz="4000" dirty="0">
+              <a:solidFill>
+                <a:schemeClr val="bg1"/>
+              </a:solidFill>
+              <a:latin typeface="Avenir Book" panose="02000503020000020003" pitchFamily="2" charset="0"/>
+            </a:endParaRPr>
+          </a:p>
+        </p:txBody>
+      </p:sp>
+    </p:spTree>
+    <p:extLst>
+      <p:ext uri="{BB962C8B-B14F-4D97-AF65-F5344CB8AC3E}">
+        <p14:creationId xmlns:p14="http://schemas.microsoft.com/office/powerpoint/2010/main" val="4058992775"/>
+      </p:ext>
+    </p:extLst>
+  </p:cSld>
+  <p:clrMapOvr>
+    <a:masterClrMapping/>
+  </p:clrMapOvr>
+</p:sld>
+</file>
+
+<file path=ppt/slides/slide12.xml><?xml version="1.0" encoding="utf-8"?>
+<p:sld xmlns:a="http://schemas.openxmlformats.org/drawingml/2006/main" xmlns:r="http://schemas.openxmlformats.org/officeDocument/2006/relationships" xmlns:p="http://schemas.openxmlformats.org/presentationml/2006/main">
+  <p:cSld>
+    <p:bg>
+      <p:bgPr>
+        <a:solidFill>
+          <a:schemeClr val="tx1"/>
+        </a:solidFill>
+        <a:effectLst/>
+      </p:bgPr>
+    </p:bg>
+    <p:spTree>
+      <p:nvGrpSpPr>
+        <p:cNvPr id="1" name="">
+          <a:extLst>
+            <a:ext uri="{FF2B5EF4-FFF2-40B4-BE49-F238E27FC236}">
+              <a16:creationId xmlns:a16="http://schemas.microsoft.com/office/drawing/2014/main" id="{235B9480-CC4D-60A9-30EB-47924A6C4341}"/>
+            </a:ext>
+          </a:extLst>
+        </p:cNvPr>
+        <p:cNvGrpSpPr/>
+        <p:nvPr/>
+      </p:nvGrpSpPr>
+      <p:grpSpPr>
+        <a:xfrm>
+          <a:off x="0" y="0"/>
+          <a:ext cx="0" cy="0"/>
+          <a:chOff x="0" y="0"/>
+          <a:chExt cx="0" cy="0"/>
+        </a:xfrm>
+      </p:grpSpPr>
+      <p:sp>
+        <p:nvSpPr>
+          <p:cNvPr id="2" name="Title 1">
+            <a:extLst>
+              <a:ext uri="{FF2B5EF4-FFF2-40B4-BE49-F238E27FC236}">
+                <a16:creationId xmlns:a16="http://schemas.microsoft.com/office/drawing/2014/main" id="{F0A085A2-0E1A-6A25-8891-C8B3CEF17434}"/>
+              </a:ext>
+            </a:extLst>
+          </p:cNvPr>
+          <p:cNvSpPr>
+            <a:spLocks noGrp="1"/>
+          </p:cNvSpPr>
+          <p:nvPr>
+            <p:ph type="ctrTitle"/>
+          </p:nvPr>
+        </p:nvSpPr>
+        <p:spPr>
+          <a:xfrm>
+            <a:off x="0" y="22612"/>
+            <a:ext cx="12192000" cy="953572"/>
+          </a:xfrm>
+        </p:spPr>
+        <p:txBody>
+          <a:bodyPr>
+            <a:normAutofit/>
+          </a:bodyPr>
+          <a:lstStyle/>
+          <a:p>
+            <a:pPr algn="l"/>
+            <a:r>
+              <a:rPr lang="en-US" sz="4800" dirty="0">
+                <a:solidFill>
+                  <a:schemeClr val="bg1"/>
+                </a:solidFill>
+                <a:latin typeface="Avenir Book" panose="02000503020000020003" pitchFamily="2" charset="0"/>
+              </a:rPr>
+              <a:t>Chorus 2</a:t>
+            </a:r>
+          </a:p>
+        </p:txBody>
+      </p:sp>
+      <p:sp>
+        <p:nvSpPr>
+          <p:cNvPr id="3" name="Subtitle 2">
+            <a:extLst>
+              <a:ext uri="{FF2B5EF4-FFF2-40B4-BE49-F238E27FC236}">
+                <a16:creationId xmlns:a16="http://schemas.microsoft.com/office/drawing/2014/main" id="{77ED0AF9-8A1F-EE0A-C826-492EA5C6336E}"/>
+              </a:ext>
+            </a:extLst>
+          </p:cNvPr>
+          <p:cNvSpPr>
+            <a:spLocks noGrp="1"/>
+          </p:cNvSpPr>
+          <p:nvPr>
+            <p:ph type="subTitle" idx="1"/>
+          </p:nvPr>
+        </p:nvSpPr>
+        <p:spPr>
+          <a:xfrm>
+            <a:off x="356260" y="976184"/>
+            <a:ext cx="11388436" cy="5301047"/>
+          </a:xfrm>
+        </p:spPr>
+        <p:txBody>
+          <a:bodyPr>
+            <a:noAutofit/>
+          </a:bodyPr>
+          <a:lstStyle/>
+          <a:p>
+            <a:pPr algn="l"/>
+            <a:endParaRPr lang="en-US" sz="4000" dirty="0">
+              <a:solidFill>
+                <a:schemeClr val="bg1"/>
+              </a:solidFill>
+              <a:latin typeface="Avenir Book" panose="02000503020000020003" pitchFamily="2" charset="0"/>
+            </a:endParaRPr>
+          </a:p>
+          <a:p>
+            <a:pPr algn="l"/>
+            <a:r>
+              <a:rPr lang="en-US" sz="4000" dirty="0">
+                <a:solidFill>
+                  <a:srgbClr val="FFFF00"/>
+                </a:solidFill>
+                <a:latin typeface="Avenir Book" panose="02000503020000020003" pitchFamily="2" charset="0"/>
+              </a:rPr>
+              <a:t>G             Em        C</a:t>
+            </a:r>
+            <a:r>
+              <a:rPr lang="en-US" sz="4000" dirty="0">
+                <a:solidFill>
+                  <a:schemeClr val="bg1"/>
+                </a:solidFill>
+                <a:latin typeface="Avenir Book" panose="02000503020000020003" pitchFamily="2" charset="0"/>
+              </a:rPr>
+              <a:t> </a:t>
+            </a:r>
+          </a:p>
+          <a:p>
+            <a:pPr algn="l"/>
+            <a:r>
+              <a:rPr lang="en-US" sz="4000" dirty="0">
+                <a:solidFill>
+                  <a:schemeClr val="bg1"/>
+                </a:solidFill>
+                <a:latin typeface="Avenir Book" panose="02000503020000020003" pitchFamily="2" charset="0"/>
+              </a:rPr>
+              <a:t>Hosanna, hosanna </a:t>
+            </a:r>
+          </a:p>
+          <a:p>
+            <a:pPr algn="l"/>
+            <a:r>
+              <a:rPr lang="en-US" sz="4000" dirty="0">
+                <a:solidFill>
+                  <a:srgbClr val="FFFF00"/>
+                </a:solidFill>
+                <a:latin typeface="Avenir Book" panose="02000503020000020003" pitchFamily="2" charset="0"/>
+              </a:rPr>
+              <a:t>                           G                 D</a:t>
+            </a:r>
+            <a:endParaRPr lang="en-US" sz="4000" dirty="0">
+              <a:solidFill>
+                <a:schemeClr val="bg1"/>
+              </a:solidFill>
+              <a:latin typeface="Avenir Book" panose="02000503020000020003" pitchFamily="2" charset="0"/>
+            </a:endParaRPr>
+          </a:p>
+          <a:p>
+            <a:pPr algn="l"/>
+            <a:r>
+              <a:rPr lang="en-US" sz="4000" dirty="0">
+                <a:solidFill>
+                  <a:schemeClr val="bg1"/>
+                </a:solidFill>
+                <a:latin typeface="Avenir Book" panose="02000503020000020003" pitchFamily="2" charset="0"/>
+              </a:rPr>
+              <a:t>Come have Your way among us</a:t>
+            </a:r>
+          </a:p>
+          <a:p>
+            <a:pPr algn="l"/>
+            <a:r>
+              <a:rPr lang="en-US" sz="4000" dirty="0">
+                <a:solidFill>
+                  <a:schemeClr val="bg1"/>
+                </a:solidFill>
+                <a:latin typeface="Avenir Book" panose="02000503020000020003" pitchFamily="2" charset="0"/>
+              </a:rPr>
+              <a:t> </a:t>
+            </a:r>
+            <a:r>
+              <a:rPr lang="en-US" sz="4000" dirty="0">
+                <a:solidFill>
+                  <a:srgbClr val="FFFF00"/>
+                </a:solidFill>
+                <a:latin typeface="Avenir Book" panose="02000503020000020003" pitchFamily="2" charset="0"/>
+              </a:rPr>
+              <a:t>                           Em                C</a:t>
+            </a:r>
+            <a:r>
+              <a:rPr lang="en-US" sz="4000" dirty="0">
+                <a:solidFill>
+                  <a:schemeClr val="bg1"/>
+                </a:solidFill>
+                <a:latin typeface="Avenir Book" panose="02000503020000020003" pitchFamily="2" charset="0"/>
+              </a:rPr>
+              <a:t> </a:t>
+            </a:r>
+          </a:p>
+          <a:p>
+            <a:pPr algn="l"/>
+            <a:r>
+              <a:rPr lang="en-US" sz="4000" dirty="0">
+                <a:solidFill>
+                  <a:schemeClr val="bg1"/>
+                </a:solidFill>
+                <a:latin typeface="Avenir Book" panose="02000503020000020003" pitchFamily="2" charset="0"/>
+              </a:rPr>
+              <a:t>We welcome You here Lord Jesus</a:t>
+            </a:r>
+          </a:p>
+          <a:p>
+            <a:pPr algn="l"/>
+            <a:endParaRPr lang="en-US" sz="4000" dirty="0">
+              <a:solidFill>
+                <a:schemeClr val="bg1"/>
+              </a:solidFill>
+              <a:latin typeface="Avenir Book" panose="02000503020000020003" pitchFamily="2" charset="0"/>
+            </a:endParaRPr>
+          </a:p>
+        </p:txBody>
+      </p:sp>
+      <p:sp>
+        <p:nvSpPr>
+          <p:cNvPr id="4" name="TextBox 3">
+            <a:extLst>
+              <a:ext uri="{FF2B5EF4-FFF2-40B4-BE49-F238E27FC236}">
+                <a16:creationId xmlns:a16="http://schemas.microsoft.com/office/drawing/2014/main" id="{1238E298-AAEB-671D-2DA3-3C0D5A5EA45D}"/>
+              </a:ext>
+            </a:extLst>
+          </p:cNvPr>
+          <p:cNvSpPr txBox="1"/>
+          <p:nvPr/>
+        </p:nvSpPr>
+        <p:spPr>
+          <a:xfrm>
+            <a:off x="9969817" y="6277231"/>
+            <a:ext cx="2131139" cy="523220"/>
+          </a:xfrm>
+          <a:prstGeom prst="rect">
+            <a:avLst/>
+          </a:prstGeom>
+          <a:noFill/>
+        </p:spPr>
+        <p:txBody>
+          <a:bodyPr wrap="square" rtlCol="0">
+            <a:spAutoFit/>
+          </a:bodyPr>
+          <a:lstStyle/>
+          <a:p>
+            <a:r>
+              <a:rPr lang="en-US" sz="2800" b="1" dirty="0">
+                <a:solidFill>
+                  <a:schemeClr val="bg1"/>
+                </a:solidFill>
+              </a:rPr>
+              <a:t>play x2</a:t>
+            </a:r>
+          </a:p>
+        </p:txBody>
+      </p:sp>
+    </p:spTree>
+    <p:extLst>
+      <p:ext uri="{BB962C8B-B14F-4D97-AF65-F5344CB8AC3E}">
+        <p14:creationId xmlns:p14="http://schemas.microsoft.com/office/powerpoint/2010/main" val="2163062207"/>
+      </p:ext>
+    </p:extLst>
+  </p:cSld>
+  <p:clrMapOvr>
+    <a:masterClrMapping/>
+  </p:clrMapOvr>
+</p:sld>
+</file>
+
 <file path=ppt/slides/slide2.xml><?xml version="1.0" encoding="utf-8"?>
 <p:sld xmlns:a="http://schemas.openxmlformats.org/drawingml/2006/main" xmlns:r="http://schemas.openxmlformats.org/officeDocument/2006/relationships" xmlns:p="http://schemas.openxmlformats.org/presentationml/2006/main">
   <p:cSld>
@@ -3512,7 +4323,7 @@
                 </a:solidFill>
                 <a:latin typeface="Avenir Book" panose="02000503020000020003" pitchFamily="2" charset="0"/>
               </a:rPr>
-              <a:t>D                                                    G</a:t>
+              <a:t>G                                                    C</a:t>
             </a:r>
           </a:p>
           <a:p>
@@ -3536,7 +4347,7 @@
                 </a:solidFill>
                 <a:latin typeface="Avenir Book" panose="02000503020000020003" pitchFamily="2" charset="0"/>
               </a:rPr>
-              <a:t>                  D</a:t>
+              <a:t>                  G</a:t>
             </a:r>
           </a:p>
           <a:p>
@@ -3560,7 +4371,7 @@
                 </a:solidFill>
                 <a:latin typeface="Avenir Book" panose="02000503020000020003" pitchFamily="2" charset="0"/>
               </a:rPr>
-              <a:t>D                                                             G  </a:t>
+              <a:t>G                                                             C  </a:t>
             </a:r>
           </a:p>
           <a:p>
@@ -3584,7 +4395,7 @@
                 </a:solidFill>
                 <a:latin typeface="Avenir Book" panose="02000503020000020003" pitchFamily="2" charset="0"/>
               </a:rPr>
-              <a:t>                    D </a:t>
+              <a:t>                    G </a:t>
             </a:r>
           </a:p>
           <a:p>
@@ -3733,7 +4544,7 @@
                 </a:solidFill>
                 <a:latin typeface="Avenir Book" panose="02000503020000020003" pitchFamily="2" charset="0"/>
               </a:rPr>
-              <a:t>A</a:t>
+              <a:t>D</a:t>
             </a:r>
           </a:p>
           <a:p>
@@ -3775,7 +4586,7 @@
                 </a:solidFill>
                 <a:latin typeface="Avenir Book" panose="02000503020000020003" pitchFamily="2" charset="0"/>
               </a:rPr>
-              <a:t>G                              D</a:t>
+              <a:t>C                              G</a:t>
             </a:r>
             <a:endParaRPr lang="en-US" sz="3200" dirty="0">
               <a:solidFill>
@@ -3814,7 +4625,7 @@
                 </a:solidFill>
                 <a:latin typeface="Avenir Book" panose="02000503020000020003" pitchFamily="2" charset="0"/>
               </a:rPr>
-              <a:t>                  A</a:t>
+              <a:t>                  D</a:t>
             </a:r>
             <a:endParaRPr lang="en-US" sz="3200" dirty="0">
               <a:solidFill>
@@ -3844,7 +4655,7 @@
                 </a:solidFill>
                 <a:latin typeface="Avenir Book" panose="02000503020000020003" pitchFamily="2" charset="0"/>
               </a:rPr>
-              <a:t>G            D</a:t>
+              <a:t>           C                           G</a:t>
             </a:r>
           </a:p>
           <a:p>
@@ -3868,17 +4679,14 @@
                 </a:solidFill>
                 <a:latin typeface="Avenir Book" panose="02000503020000020003" pitchFamily="2" charset="0"/>
               </a:rPr>
-              <a:t>              A</a:t>
-            </a:r>
-            <a:r>
-              <a:rPr lang="en-US" sz="3200" dirty="0">
-                <a:solidFill>
-                  <a:schemeClr val="bg1"/>
-                </a:solidFill>
-                <a:latin typeface="Avenir Book" panose="02000503020000020003" pitchFamily="2" charset="0"/>
-              </a:rPr>
-              <a:t> </a:t>
-            </a:r>
+              <a:t>              D</a:t>
+            </a:r>
+            <a:endParaRPr lang="en-US" sz="3200" dirty="0">
+              <a:solidFill>
+                <a:schemeClr val="bg1"/>
+              </a:solidFill>
+              <a:latin typeface="Avenir Book" panose="02000503020000020003" pitchFamily="2" charset="0"/>
+            </a:endParaRPr>
           </a:p>
           <a:p>
             <a:pPr algn="l"/>
@@ -3940,65 +4748,24 @@
       </p:grpSpPr>
       <p:sp>
         <p:nvSpPr>
-          <p:cNvPr id="2" name="Title 1">
-            <a:extLst>
-              <a:ext uri="{FF2B5EF4-FFF2-40B4-BE49-F238E27FC236}">
-                <a16:creationId xmlns:a16="http://schemas.microsoft.com/office/drawing/2014/main" id="{2DAD34F4-F80D-FF1C-3268-4E2E6C2A8653}"/>
-              </a:ext>
-            </a:extLst>
-          </p:cNvPr>
-          <p:cNvSpPr>
-            <a:spLocks noGrp="1"/>
-          </p:cNvSpPr>
-          <p:nvPr>
-            <p:ph type="ctrTitle"/>
+          <p:cNvPr id="3" name="Subtitle 2">
+            <a:extLst>
+              <a:ext uri="{FF2B5EF4-FFF2-40B4-BE49-F238E27FC236}">
+                <a16:creationId xmlns:a16="http://schemas.microsoft.com/office/drawing/2014/main" id="{06FF352C-7806-2DA1-BEDF-32FA335C973C}"/>
+              </a:ext>
+            </a:extLst>
+          </p:cNvPr>
+          <p:cNvSpPr>
+            <a:spLocks noGrp="1"/>
+          </p:cNvSpPr>
+          <p:nvPr>
+            <p:ph type="subTitle" idx="1"/>
           </p:nvPr>
         </p:nvSpPr>
         <p:spPr>
           <a:xfrm>
-            <a:off x="0" y="22612"/>
-            <a:ext cx="12192000" cy="953572"/>
-          </a:xfrm>
-        </p:spPr>
-        <p:txBody>
-          <a:bodyPr>
-            <a:normAutofit/>
-          </a:bodyPr>
-          <a:lstStyle/>
-          <a:p>
-            <a:pPr algn="l"/>
-            <a:r>
-              <a:rPr lang="en-US" sz="4800" dirty="0">
-                <a:solidFill>
-                  <a:schemeClr val="bg1"/>
-                </a:solidFill>
-                <a:latin typeface="Avenir Book" panose="02000503020000020003" pitchFamily="2" charset="0"/>
-              </a:rPr>
-              <a:t>Chorus 1</a:t>
-            </a:r>
-          </a:p>
-        </p:txBody>
-      </p:sp>
-      <p:sp>
-        <p:nvSpPr>
-          <p:cNvPr id="3" name="Subtitle 2">
-            <a:extLst>
-              <a:ext uri="{FF2B5EF4-FFF2-40B4-BE49-F238E27FC236}">
-                <a16:creationId xmlns:a16="http://schemas.microsoft.com/office/drawing/2014/main" id="{06FF352C-7806-2DA1-BEDF-32FA335C973C}"/>
-              </a:ext>
-            </a:extLst>
-          </p:cNvPr>
-          <p:cNvSpPr>
-            <a:spLocks noGrp="1"/>
-          </p:cNvSpPr>
-          <p:nvPr>
-            <p:ph type="subTitle" idx="1"/>
-          </p:nvPr>
-        </p:nvSpPr>
-        <p:spPr>
-          <a:xfrm>
-            <a:off x="356260" y="976184"/>
-            <a:ext cx="11388436" cy="5301047"/>
+            <a:off x="356260" y="296562"/>
+            <a:ext cx="11246735" cy="6215449"/>
           </a:xfrm>
         </p:spPr>
         <p:txBody>
@@ -4024,7 +4791,7 @@
                 </a:solidFill>
                 <a:latin typeface="Avenir Book" panose="02000503020000020003" pitchFamily="2" charset="0"/>
               </a:rPr>
-              <a:t>D             Bm        G</a:t>
+              <a:t>G             Em        C</a:t>
             </a:r>
             <a:r>
               <a:rPr lang="en-US" sz="4000" dirty="0">
@@ -4057,7 +4824,7 @@
                 </a:solidFill>
                 <a:latin typeface="Avenir Book" panose="02000503020000020003" pitchFamily="2" charset="0"/>
               </a:rPr>
-              <a:t>                   D             A</a:t>
+              <a:t>                   G             D</a:t>
             </a:r>
             <a:r>
               <a:rPr lang="en-US" sz="4000" dirty="0">
@@ -4099,7 +4866,7 @@
                 </a:solidFill>
                 <a:latin typeface="Avenir Book" panose="02000503020000020003" pitchFamily="2" charset="0"/>
               </a:rPr>
-              <a:t>               Bm                G</a:t>
+              <a:t>               Em                C</a:t>
             </a:r>
             <a:r>
               <a:rPr lang="en-US" sz="4000" dirty="0">
@@ -4131,6 +4898,45 @@
               </a:solidFill>
               <a:latin typeface="Avenir Book" panose="02000503020000020003" pitchFamily="2" charset="0"/>
             </a:endParaRPr>
+          </a:p>
+        </p:txBody>
+      </p:sp>
+      <p:sp>
+        <p:nvSpPr>
+          <p:cNvPr id="6" name="TextBox 5">
+            <a:extLst>
+              <a:ext uri="{FF2B5EF4-FFF2-40B4-BE49-F238E27FC236}">
+                <a16:creationId xmlns:a16="http://schemas.microsoft.com/office/drawing/2014/main" id="{E87ED1C6-8090-A96C-6695-9C21334C69F1}"/>
+              </a:ext>
+            </a:extLst>
+          </p:cNvPr>
+          <p:cNvSpPr txBox="1"/>
+          <p:nvPr/>
+        </p:nvSpPr>
+        <p:spPr>
+          <a:xfrm>
+            <a:off x="9969817" y="6277231"/>
+            <a:ext cx="2131139" cy="523220"/>
+          </a:xfrm>
+          <a:prstGeom prst="rect">
+            <a:avLst/>
+          </a:prstGeom>
+          <a:noFill/>
+        </p:spPr>
+        <p:txBody>
+          <a:bodyPr wrap="square" rtlCol="0">
+            <a:spAutoFit/>
+          </a:bodyPr>
+          <a:lstStyle/>
+          <a:p>
+            <a:r>
+              <a:rPr lang="en-US" sz="2800" b="1" dirty="0">
+                <a:solidFill>
+                  <a:schemeClr val="bg1"/>
+                </a:solidFill>
+              </a:rPr>
+              <a:t>play x2</a:t>
+            </a:r>
           </a:p>
         </p:txBody>
       </p:sp>
@@ -4257,7 +5063,7 @@
                 </a:solidFill>
                 <a:latin typeface="Avenir Book" panose="02000503020000020003" pitchFamily="2" charset="0"/>
               </a:rPr>
-              <a:t>D                                                         G </a:t>
+              <a:t>G                                                         C </a:t>
             </a:r>
           </a:p>
           <a:p>
@@ -4281,7 +5087,7 @@
                 </a:solidFill>
                 <a:latin typeface="Avenir Book" panose="02000503020000020003" pitchFamily="2" charset="0"/>
               </a:rPr>
-              <a:t>                  D</a:t>
+              <a:t>                  G</a:t>
             </a:r>
           </a:p>
           <a:p>
@@ -4305,7 +5111,7 @@
                 </a:solidFill>
                 <a:latin typeface="Avenir Book" panose="02000503020000020003" pitchFamily="2" charset="0"/>
               </a:rPr>
-              <a:t>D                                                             G</a:t>
+              <a:t>G                                                             C</a:t>
             </a:r>
           </a:p>
           <a:p>
@@ -4329,7 +5135,7 @@
                 </a:solidFill>
                 <a:latin typeface="Avenir Book" panose="02000503020000020003" pitchFamily="2" charset="0"/>
               </a:rPr>
-              <a:t>                     D</a:t>
+              <a:t>                     G</a:t>
             </a:r>
           </a:p>
           <a:p>
@@ -4360,6 +5166,296 @@
 </file>
 
 <file path=ppt/slides/slide6.xml><?xml version="1.0" encoding="utf-8"?>
+<p:sld xmlns:a="http://schemas.openxmlformats.org/drawingml/2006/main" xmlns:r="http://schemas.openxmlformats.org/officeDocument/2006/relationships" xmlns:p="http://schemas.openxmlformats.org/presentationml/2006/main">
+  <p:cSld>
+    <p:bg>
+      <p:bgPr>
+        <a:solidFill>
+          <a:schemeClr val="accent1">
+            <a:lumMod val="75000"/>
+          </a:schemeClr>
+        </a:solidFill>
+        <a:effectLst/>
+      </p:bgPr>
+    </p:bg>
+    <p:spTree>
+      <p:nvGrpSpPr>
+        <p:cNvPr id="1" name="">
+          <a:extLst>
+            <a:ext uri="{FF2B5EF4-FFF2-40B4-BE49-F238E27FC236}">
+              <a16:creationId xmlns:a16="http://schemas.microsoft.com/office/drawing/2014/main" id="{6A5E8D88-D092-9666-D968-65A1A974DCB5}"/>
+            </a:ext>
+          </a:extLst>
+        </p:cNvPr>
+        <p:cNvGrpSpPr/>
+        <p:nvPr/>
+      </p:nvGrpSpPr>
+      <p:grpSpPr>
+        <a:xfrm>
+          <a:off x="0" y="0"/>
+          <a:ext cx="0" cy="0"/>
+          <a:chOff x="0" y="0"/>
+          <a:chExt cx="0" cy="0"/>
+        </a:xfrm>
+      </p:grpSpPr>
+      <p:sp>
+        <p:nvSpPr>
+          <p:cNvPr id="2" name="Title 1">
+            <a:extLst>
+              <a:ext uri="{FF2B5EF4-FFF2-40B4-BE49-F238E27FC236}">
+                <a16:creationId xmlns:a16="http://schemas.microsoft.com/office/drawing/2014/main" id="{4E9816DC-8FC9-2A67-A90B-4A9240D1E076}"/>
+              </a:ext>
+            </a:extLst>
+          </p:cNvPr>
+          <p:cNvSpPr>
+            <a:spLocks noGrp="1"/>
+          </p:cNvSpPr>
+          <p:nvPr>
+            <p:ph type="ctrTitle"/>
+          </p:nvPr>
+        </p:nvSpPr>
+        <p:spPr>
+          <a:xfrm>
+            <a:off x="0" y="22612"/>
+            <a:ext cx="12192000" cy="953572"/>
+          </a:xfrm>
+        </p:spPr>
+        <p:txBody>
+          <a:bodyPr>
+            <a:normAutofit/>
+          </a:bodyPr>
+          <a:lstStyle/>
+          <a:p>
+            <a:pPr algn="l"/>
+            <a:r>
+              <a:rPr lang="en-US" sz="4800" dirty="0">
+                <a:solidFill>
+                  <a:schemeClr val="bg1"/>
+                </a:solidFill>
+                <a:latin typeface="Avenir Book" panose="02000503020000020003" pitchFamily="2" charset="0"/>
+              </a:rPr>
+              <a:t>Pre-Chorus</a:t>
+            </a:r>
+          </a:p>
+        </p:txBody>
+      </p:sp>
+      <p:sp>
+        <p:nvSpPr>
+          <p:cNvPr id="3" name="Subtitle 2">
+            <a:extLst>
+              <a:ext uri="{FF2B5EF4-FFF2-40B4-BE49-F238E27FC236}">
+                <a16:creationId xmlns:a16="http://schemas.microsoft.com/office/drawing/2014/main" id="{ED28EB23-FD38-7801-5BDE-85C9DEDD2778}"/>
+              </a:ext>
+            </a:extLst>
+          </p:cNvPr>
+          <p:cNvSpPr>
+            <a:spLocks noGrp="1"/>
+          </p:cNvSpPr>
+          <p:nvPr>
+            <p:ph type="subTitle" idx="1"/>
+          </p:nvPr>
+        </p:nvSpPr>
+        <p:spPr>
+          <a:xfrm>
+            <a:off x="356260" y="976184"/>
+            <a:ext cx="11388436" cy="5301047"/>
+          </a:xfrm>
+        </p:spPr>
+        <p:txBody>
+          <a:bodyPr>
+            <a:noAutofit/>
+          </a:bodyPr>
+          <a:lstStyle/>
+          <a:p>
+            <a:pPr algn="l"/>
+            <a:r>
+              <a:rPr lang="en-US" sz="3200" dirty="0">
+                <a:solidFill>
+                  <a:schemeClr val="bg1"/>
+                </a:solidFill>
+                <a:latin typeface="Avenir Book" panose="02000503020000020003" pitchFamily="2" charset="0"/>
+              </a:rPr>
+              <a:t>                           </a:t>
+            </a:r>
+            <a:r>
+              <a:rPr lang="en-US" sz="3200" dirty="0">
+                <a:solidFill>
+                  <a:srgbClr val="FFFF00"/>
+                </a:solidFill>
+                <a:latin typeface="Avenir Book" panose="02000503020000020003" pitchFamily="2" charset="0"/>
+              </a:rPr>
+              <a:t>D</a:t>
+            </a:r>
+          </a:p>
+          <a:p>
+            <a:pPr algn="l"/>
+            <a:r>
+              <a:rPr lang="en-US" sz="3200" dirty="0" err="1">
+                <a:solidFill>
+                  <a:schemeClr val="bg1"/>
+                </a:solidFill>
+                <a:latin typeface="Avenir Book" panose="02000503020000020003" pitchFamily="2" charset="0"/>
+              </a:rPr>
+              <a:t>'Cause</a:t>
+            </a:r>
+            <a:r>
+              <a:rPr lang="en-US" sz="3200" dirty="0">
+                <a:solidFill>
+                  <a:schemeClr val="bg1"/>
+                </a:solidFill>
+                <a:latin typeface="Avenir Book" panose="02000503020000020003" pitchFamily="2" charset="0"/>
+              </a:rPr>
+              <a:t> when we see You</a:t>
+            </a:r>
+          </a:p>
+          <a:p>
+            <a:pPr algn="l"/>
+            <a:r>
+              <a:rPr lang="en-US" sz="3200" dirty="0">
+                <a:solidFill>
+                  <a:schemeClr val="bg1"/>
+                </a:solidFill>
+                <a:latin typeface="Avenir Book" panose="02000503020000020003" pitchFamily="2" charset="0"/>
+              </a:rPr>
+              <a:t>             </a:t>
+            </a:r>
+            <a:r>
+              <a:rPr lang="en-US" sz="3200" dirty="0">
+                <a:solidFill>
+                  <a:srgbClr val="FFFF00"/>
+                </a:solidFill>
+                <a:latin typeface="Avenir Book" panose="02000503020000020003" pitchFamily="2" charset="0"/>
+              </a:rPr>
+              <a:t>C                              G</a:t>
+            </a:r>
+            <a:endParaRPr lang="en-US" sz="3200" dirty="0">
+              <a:solidFill>
+                <a:schemeClr val="bg1"/>
+              </a:solidFill>
+              <a:latin typeface="Avenir Book" panose="02000503020000020003" pitchFamily="2" charset="0"/>
+            </a:endParaRPr>
+          </a:p>
+          <a:p>
+            <a:pPr algn="l"/>
+            <a:r>
+              <a:rPr lang="en-US" sz="3200" dirty="0">
+                <a:solidFill>
+                  <a:schemeClr val="bg1"/>
+                </a:solidFill>
+                <a:latin typeface="Avenir Book" panose="02000503020000020003" pitchFamily="2" charset="0"/>
+              </a:rPr>
+              <a:t>We find strength to face the day</a:t>
+            </a:r>
+          </a:p>
+          <a:p>
+            <a:pPr algn="l"/>
+            <a:r>
+              <a:rPr lang="en-US" sz="3200" dirty="0">
+                <a:solidFill>
+                  <a:schemeClr val="bg1"/>
+                </a:solidFill>
+                <a:latin typeface="Avenir Book" panose="02000503020000020003" pitchFamily="2" charset="0"/>
+              </a:rPr>
+              <a:t>  </a:t>
+            </a:r>
+            <a:r>
+              <a:rPr lang="en-US" sz="3200" dirty="0">
+                <a:solidFill>
+                  <a:srgbClr val="FFFF00"/>
+                </a:solidFill>
+                <a:latin typeface="Avenir Book" panose="02000503020000020003" pitchFamily="2" charset="0"/>
+              </a:rPr>
+              <a:t>                  D</a:t>
+            </a:r>
+            <a:endParaRPr lang="en-US" sz="3200" dirty="0">
+              <a:solidFill>
+                <a:schemeClr val="bg1"/>
+              </a:solidFill>
+              <a:latin typeface="Avenir Book" panose="02000503020000020003" pitchFamily="2" charset="0"/>
+            </a:endParaRPr>
+          </a:p>
+          <a:p>
+            <a:pPr algn="l"/>
+            <a:r>
+              <a:rPr lang="en-US" sz="3200" dirty="0">
+                <a:solidFill>
+                  <a:schemeClr val="bg1"/>
+                </a:solidFill>
+                <a:latin typeface="Avenir Book" panose="02000503020000020003" pitchFamily="2" charset="0"/>
+              </a:rPr>
+              <a:t>And in Your presence </a:t>
+            </a:r>
+          </a:p>
+          <a:p>
+            <a:pPr algn="l"/>
+            <a:r>
+              <a:rPr lang="en-US" sz="3200" dirty="0">
+                <a:solidFill>
+                  <a:srgbClr val="FFFF00"/>
+                </a:solidFill>
+                <a:latin typeface="Avenir Book" panose="02000503020000020003" pitchFamily="2" charset="0"/>
+              </a:rPr>
+              <a:t>           C                           G</a:t>
+            </a:r>
+          </a:p>
+          <a:p>
+            <a:pPr algn="l"/>
+            <a:r>
+              <a:rPr lang="en-US" sz="3200" dirty="0">
+                <a:solidFill>
+                  <a:schemeClr val="bg1"/>
+                </a:solidFill>
+                <a:latin typeface="Avenir Book" panose="02000503020000020003" pitchFamily="2" charset="0"/>
+              </a:rPr>
+              <a:t>All our fears are washed away</a:t>
+            </a:r>
+          </a:p>
+          <a:p>
+            <a:pPr algn="l"/>
+            <a:r>
+              <a:rPr lang="en-US" sz="3200" dirty="0">
+                <a:solidFill>
+                  <a:srgbClr val="FFFF00"/>
+                </a:solidFill>
+                <a:latin typeface="Avenir Book" panose="02000503020000020003" pitchFamily="2" charset="0"/>
+              </a:rPr>
+              <a:t>              D</a:t>
+            </a:r>
+            <a:endParaRPr lang="en-US" sz="3200" dirty="0">
+              <a:solidFill>
+                <a:schemeClr val="bg1"/>
+              </a:solidFill>
+              <a:latin typeface="Avenir Book" panose="02000503020000020003" pitchFamily="2" charset="0"/>
+            </a:endParaRPr>
+          </a:p>
+          <a:p>
+            <a:pPr algn="l"/>
+            <a:r>
+              <a:rPr lang="en-US" sz="3200" dirty="0">
+                <a:solidFill>
+                  <a:schemeClr val="bg1"/>
+                </a:solidFill>
+                <a:latin typeface="Avenir Book" panose="02000503020000020003" pitchFamily="2" charset="0"/>
+              </a:rPr>
+              <a:t>washed  away</a:t>
+            </a:r>
+          </a:p>
+        </p:txBody>
+      </p:sp>
+    </p:spTree>
+    <p:extLst>
+      <p:ext uri="{BB962C8B-B14F-4D97-AF65-F5344CB8AC3E}">
+        <p14:creationId xmlns:p14="http://schemas.microsoft.com/office/powerpoint/2010/main" val="3368485220"/>
+      </p:ext>
+    </p:extLst>
+  </p:cSld>
+  <p:clrMapOvr>
+    <a:masterClrMapping/>
+  </p:clrMapOvr>
+</p:sld>
+</file>
+
+<file path=ppt/slides/slide7.xml><?xml version="1.0" encoding="utf-8"?>
 <p:sld xmlns:a="http://schemas.openxmlformats.org/drawingml/2006/main" xmlns:r="http://schemas.openxmlformats.org/officeDocument/2006/relationships" xmlns:p="http://schemas.openxmlformats.org/presentationml/2006/main">
   <p:cSld>
     <p:bg>
@@ -4476,7 +5572,7 @@
                 </a:solidFill>
                 <a:latin typeface="Avenir Book" panose="02000503020000020003" pitchFamily="2" charset="0"/>
               </a:rPr>
-              <a:t>D             Bm        G</a:t>
+              <a:t>G             Em        C</a:t>
             </a:r>
             <a:r>
               <a:rPr lang="en-US" sz="4000" dirty="0">
@@ -4509,7 +5605,7 @@
                 </a:solidFill>
                 <a:latin typeface="Avenir Book" panose="02000503020000020003" pitchFamily="2" charset="0"/>
               </a:rPr>
-              <a:t>                   D             A</a:t>
+              <a:t>                   G             D</a:t>
             </a:r>
             <a:r>
               <a:rPr lang="en-US" sz="4000" dirty="0">
@@ -4551,7 +5647,7 @@
                 </a:solidFill>
                 <a:latin typeface="Avenir Book" panose="02000503020000020003" pitchFamily="2" charset="0"/>
               </a:rPr>
-              <a:t>               Bm                G</a:t>
+              <a:t>               Em                C</a:t>
             </a:r>
             <a:r>
               <a:rPr lang="en-US" sz="4000" dirty="0">
@@ -4599,7 +5695,7 @@
 </p:sld>
 </file>
 
-<file path=ppt/slides/slide7.xml><?xml version="1.0" encoding="utf-8"?>
+<file path=ppt/slides/slide8.xml><?xml version="1.0" encoding="utf-8"?>
 <p:sld xmlns:a="http://schemas.openxmlformats.org/drawingml/2006/main" xmlns:r="http://schemas.openxmlformats.org/officeDocument/2006/relationships" xmlns:p="http://schemas.openxmlformats.org/presentationml/2006/main">
   <p:cSld>
     <p:bg>
@@ -4716,7 +5812,7 @@
                 </a:solidFill>
                 <a:latin typeface="Avenir Book" panose="02000503020000020003" pitchFamily="2" charset="0"/>
               </a:rPr>
-              <a:t>D             Bm        G</a:t>
+              <a:t>G             Em        C</a:t>
             </a:r>
             <a:r>
               <a:rPr lang="en-US" sz="4000" dirty="0">
@@ -4749,74 +5845,8 @@
                 </a:solidFill>
                 <a:latin typeface="Avenir Book" panose="02000503020000020003" pitchFamily="2" charset="0"/>
               </a:rPr>
-              <a:t>                           D                 A</a:t>
-            </a:r>
-            <a:r>
-              <a:rPr lang="en-US" sz="4000" dirty="0">
-                <a:solidFill>
-                  <a:schemeClr val="bg1"/>
-                </a:solidFill>
-                <a:latin typeface="Avenir Book" panose="02000503020000020003" pitchFamily="2" charset="0"/>
-              </a:rPr>
-              <a:t>   </a:t>
-            </a:r>
-          </a:p>
-          <a:p>
-            <a:pPr algn="l"/>
-            <a:r>
-              <a:rPr lang="en-US" sz="4000" dirty="0">
-                <a:solidFill>
-                  <a:schemeClr val="bg1"/>
-                </a:solidFill>
-                <a:latin typeface="Avenir Book" panose="02000503020000020003" pitchFamily="2" charset="0"/>
-              </a:rPr>
-              <a:t>Come have Your way among us</a:t>
-            </a:r>
-          </a:p>
-          <a:p>
-            <a:pPr algn="l"/>
-            <a:r>
-              <a:rPr lang="en-US" sz="4000" dirty="0">
-                <a:solidFill>
-                  <a:schemeClr val="bg1"/>
-                </a:solidFill>
-                <a:latin typeface="Avenir Book" panose="02000503020000020003" pitchFamily="2" charset="0"/>
-              </a:rPr>
-              <a:t> </a:t>
-            </a:r>
-            <a:r>
-              <a:rPr lang="en-US" sz="4000" dirty="0">
-                <a:solidFill>
-                  <a:srgbClr val="FFFF00"/>
-                </a:solidFill>
-                <a:latin typeface="Avenir Book" panose="02000503020000020003" pitchFamily="2" charset="0"/>
-              </a:rPr>
-              <a:t>                           Bm                G</a:t>
-            </a:r>
-            <a:r>
-              <a:rPr lang="en-US" sz="4000" dirty="0">
-                <a:solidFill>
-                  <a:schemeClr val="bg1"/>
-                </a:solidFill>
-                <a:latin typeface="Avenir Book" panose="02000503020000020003" pitchFamily="2" charset="0"/>
-              </a:rPr>
-              <a:t> </a:t>
-            </a:r>
-          </a:p>
-          <a:p>
-            <a:pPr algn="l"/>
-            <a:r>
-              <a:rPr lang="en-US" sz="4000" dirty="0">
-                <a:solidFill>
-                  <a:schemeClr val="bg1"/>
-                </a:solidFill>
-                <a:latin typeface="Avenir Book" panose="02000503020000020003" pitchFamily="2" charset="0"/>
-              </a:rPr>
-              <a:t>We welcome You here Lord Jesus</a:t>
-            </a:r>
-          </a:p>
-          <a:p>
-            <a:pPr algn="l"/>
+              <a:t>                           G                 D</a:t>
+            </a:r>
             <a:endParaRPr lang="en-US" sz="4000" dirty="0">
               <a:solidFill>
                 <a:schemeClr val="bg1"/>
@@ -4824,12 +5854,335 @@
               <a:latin typeface="Avenir Book" panose="02000503020000020003" pitchFamily="2" charset="0"/>
             </a:endParaRPr>
           </a:p>
+          <a:p>
+            <a:pPr algn="l"/>
+            <a:r>
+              <a:rPr lang="en-US" sz="4000" dirty="0">
+                <a:solidFill>
+                  <a:schemeClr val="bg1"/>
+                </a:solidFill>
+                <a:latin typeface="Avenir Book" panose="02000503020000020003" pitchFamily="2" charset="0"/>
+              </a:rPr>
+              <a:t>Come have Your way among us</a:t>
+            </a:r>
+          </a:p>
+          <a:p>
+            <a:pPr algn="l"/>
+            <a:r>
+              <a:rPr lang="en-US" sz="4000" dirty="0">
+                <a:solidFill>
+                  <a:schemeClr val="bg1"/>
+                </a:solidFill>
+                <a:latin typeface="Avenir Book" panose="02000503020000020003" pitchFamily="2" charset="0"/>
+              </a:rPr>
+              <a:t> </a:t>
+            </a:r>
+            <a:r>
+              <a:rPr lang="en-US" sz="4000" dirty="0">
+                <a:solidFill>
+                  <a:srgbClr val="FFFF00"/>
+                </a:solidFill>
+                <a:latin typeface="Avenir Book" panose="02000503020000020003" pitchFamily="2" charset="0"/>
+              </a:rPr>
+              <a:t>                           Em                C</a:t>
+            </a:r>
+            <a:r>
+              <a:rPr lang="en-US" sz="4000" dirty="0">
+                <a:solidFill>
+                  <a:schemeClr val="bg1"/>
+                </a:solidFill>
+                <a:latin typeface="Avenir Book" panose="02000503020000020003" pitchFamily="2" charset="0"/>
+              </a:rPr>
+              <a:t> </a:t>
+            </a:r>
+          </a:p>
+          <a:p>
+            <a:pPr algn="l"/>
+            <a:r>
+              <a:rPr lang="en-US" sz="4000" dirty="0">
+                <a:solidFill>
+                  <a:schemeClr val="bg1"/>
+                </a:solidFill>
+                <a:latin typeface="Avenir Book" panose="02000503020000020003" pitchFamily="2" charset="0"/>
+              </a:rPr>
+              <a:t>We welcome You here Lord Jesus</a:t>
+            </a:r>
+          </a:p>
+          <a:p>
+            <a:pPr algn="l"/>
+            <a:endParaRPr lang="en-US" sz="4000" dirty="0">
+              <a:solidFill>
+                <a:schemeClr val="bg1"/>
+              </a:solidFill>
+              <a:latin typeface="Avenir Book" panose="02000503020000020003" pitchFamily="2" charset="0"/>
+            </a:endParaRPr>
+          </a:p>
         </p:txBody>
       </p:sp>
     </p:spTree>
     <p:extLst>
       <p:ext uri="{BB962C8B-B14F-4D97-AF65-F5344CB8AC3E}">
         <p14:creationId xmlns:p14="http://schemas.microsoft.com/office/powerpoint/2010/main" val="3665372609"/>
+      </p:ext>
+    </p:extLst>
+  </p:cSld>
+  <p:clrMapOvr>
+    <a:masterClrMapping/>
+  </p:clrMapOvr>
+</p:sld>
+</file>
+
+<file path=ppt/slides/slide9.xml><?xml version="1.0" encoding="utf-8"?>
+<p:sld xmlns:a="http://schemas.openxmlformats.org/drawingml/2006/main" xmlns:r="http://schemas.openxmlformats.org/officeDocument/2006/relationships" xmlns:p="http://schemas.openxmlformats.org/presentationml/2006/main">
+  <p:cSld>
+    <p:bg>
+      <p:bgPr>
+        <a:solidFill>
+          <a:schemeClr val="accent1">
+            <a:lumMod val="75000"/>
+          </a:schemeClr>
+        </a:solidFill>
+        <a:effectLst/>
+      </p:bgPr>
+    </p:bg>
+    <p:spTree>
+      <p:nvGrpSpPr>
+        <p:cNvPr id="1" name="">
+          <a:extLst>
+            <a:ext uri="{FF2B5EF4-FFF2-40B4-BE49-F238E27FC236}">
+              <a16:creationId xmlns:a16="http://schemas.microsoft.com/office/drawing/2014/main" id="{CED870E8-72B2-22C7-588E-BB2286B4A398}"/>
+            </a:ext>
+          </a:extLst>
+        </p:cNvPr>
+        <p:cNvGrpSpPr/>
+        <p:nvPr/>
+      </p:nvGrpSpPr>
+      <p:grpSpPr>
+        <a:xfrm>
+          <a:off x="0" y="0"/>
+          <a:ext cx="0" cy="0"/>
+          <a:chOff x="0" y="0"/>
+          <a:chExt cx="0" cy="0"/>
+        </a:xfrm>
+      </p:grpSpPr>
+      <p:sp>
+        <p:nvSpPr>
+          <p:cNvPr id="2" name="Title 1">
+            <a:extLst>
+              <a:ext uri="{FF2B5EF4-FFF2-40B4-BE49-F238E27FC236}">
+                <a16:creationId xmlns:a16="http://schemas.microsoft.com/office/drawing/2014/main" id="{392A7CB3-1DA1-C646-D861-3B87F377A626}"/>
+              </a:ext>
+            </a:extLst>
+          </p:cNvPr>
+          <p:cNvSpPr>
+            <a:spLocks noGrp="1"/>
+          </p:cNvSpPr>
+          <p:nvPr>
+            <p:ph type="ctrTitle"/>
+          </p:nvPr>
+        </p:nvSpPr>
+        <p:spPr>
+          <a:xfrm>
+            <a:off x="0" y="22612"/>
+            <a:ext cx="12192000" cy="953572"/>
+          </a:xfrm>
+        </p:spPr>
+        <p:txBody>
+          <a:bodyPr>
+            <a:normAutofit/>
+          </a:bodyPr>
+          <a:lstStyle/>
+          <a:p>
+            <a:pPr algn="l"/>
+            <a:r>
+              <a:rPr lang="en-US" sz="4800" dirty="0">
+                <a:solidFill>
+                  <a:schemeClr val="bg1"/>
+                </a:solidFill>
+                <a:latin typeface="Avenir Book" panose="02000503020000020003" pitchFamily="2" charset="0"/>
+              </a:rPr>
+              <a:t>Pre-Chorus</a:t>
+            </a:r>
+          </a:p>
+        </p:txBody>
+      </p:sp>
+      <p:sp>
+        <p:nvSpPr>
+          <p:cNvPr id="3" name="Subtitle 2">
+            <a:extLst>
+              <a:ext uri="{FF2B5EF4-FFF2-40B4-BE49-F238E27FC236}">
+                <a16:creationId xmlns:a16="http://schemas.microsoft.com/office/drawing/2014/main" id="{067B346C-470C-43DF-5AFD-F13FC092EA86}"/>
+              </a:ext>
+            </a:extLst>
+          </p:cNvPr>
+          <p:cNvSpPr>
+            <a:spLocks noGrp="1"/>
+          </p:cNvSpPr>
+          <p:nvPr>
+            <p:ph type="subTitle" idx="1"/>
+          </p:nvPr>
+        </p:nvSpPr>
+        <p:spPr>
+          <a:xfrm>
+            <a:off x="356260" y="976184"/>
+            <a:ext cx="11388436" cy="5301047"/>
+          </a:xfrm>
+        </p:spPr>
+        <p:txBody>
+          <a:bodyPr>
+            <a:noAutofit/>
+          </a:bodyPr>
+          <a:lstStyle/>
+          <a:p>
+            <a:pPr algn="l"/>
+            <a:r>
+              <a:rPr lang="en-US" sz="3200" dirty="0">
+                <a:solidFill>
+                  <a:schemeClr val="bg1"/>
+                </a:solidFill>
+                <a:latin typeface="Avenir Book" panose="02000503020000020003" pitchFamily="2" charset="0"/>
+              </a:rPr>
+              <a:t>                           </a:t>
+            </a:r>
+            <a:r>
+              <a:rPr lang="en-US" sz="3200" dirty="0">
+                <a:solidFill>
+                  <a:srgbClr val="FFFF00"/>
+                </a:solidFill>
+                <a:latin typeface="Avenir Book" panose="02000503020000020003" pitchFamily="2" charset="0"/>
+              </a:rPr>
+              <a:t>D</a:t>
+            </a:r>
+          </a:p>
+          <a:p>
+            <a:pPr algn="l"/>
+            <a:r>
+              <a:rPr lang="en-US" sz="3200" dirty="0" err="1">
+                <a:solidFill>
+                  <a:schemeClr val="bg1"/>
+                </a:solidFill>
+                <a:latin typeface="Avenir Book" panose="02000503020000020003" pitchFamily="2" charset="0"/>
+              </a:rPr>
+              <a:t>'Cause</a:t>
+            </a:r>
+            <a:r>
+              <a:rPr lang="en-US" sz="3200" dirty="0">
+                <a:solidFill>
+                  <a:schemeClr val="bg1"/>
+                </a:solidFill>
+                <a:latin typeface="Avenir Book" panose="02000503020000020003" pitchFamily="2" charset="0"/>
+              </a:rPr>
+              <a:t> when we see You</a:t>
+            </a:r>
+          </a:p>
+          <a:p>
+            <a:pPr algn="l"/>
+            <a:r>
+              <a:rPr lang="en-US" sz="3200" dirty="0">
+                <a:solidFill>
+                  <a:schemeClr val="bg1"/>
+                </a:solidFill>
+                <a:latin typeface="Avenir Book" panose="02000503020000020003" pitchFamily="2" charset="0"/>
+              </a:rPr>
+              <a:t>             </a:t>
+            </a:r>
+            <a:r>
+              <a:rPr lang="en-US" sz="3200" dirty="0">
+                <a:solidFill>
+                  <a:srgbClr val="FFFF00"/>
+                </a:solidFill>
+                <a:latin typeface="Avenir Book" panose="02000503020000020003" pitchFamily="2" charset="0"/>
+              </a:rPr>
+              <a:t>C                              G</a:t>
+            </a:r>
+            <a:endParaRPr lang="en-US" sz="3200" dirty="0">
+              <a:solidFill>
+                <a:schemeClr val="bg1"/>
+              </a:solidFill>
+              <a:latin typeface="Avenir Book" panose="02000503020000020003" pitchFamily="2" charset="0"/>
+            </a:endParaRPr>
+          </a:p>
+          <a:p>
+            <a:pPr algn="l"/>
+            <a:r>
+              <a:rPr lang="en-US" sz="3200" dirty="0">
+                <a:solidFill>
+                  <a:schemeClr val="bg1"/>
+                </a:solidFill>
+                <a:latin typeface="Avenir Book" panose="02000503020000020003" pitchFamily="2" charset="0"/>
+              </a:rPr>
+              <a:t>We find strength to face the day</a:t>
+            </a:r>
+          </a:p>
+          <a:p>
+            <a:pPr algn="l"/>
+            <a:r>
+              <a:rPr lang="en-US" sz="3200" dirty="0">
+                <a:solidFill>
+                  <a:schemeClr val="bg1"/>
+                </a:solidFill>
+                <a:latin typeface="Avenir Book" panose="02000503020000020003" pitchFamily="2" charset="0"/>
+              </a:rPr>
+              <a:t>  </a:t>
+            </a:r>
+            <a:r>
+              <a:rPr lang="en-US" sz="3200" dirty="0">
+                <a:solidFill>
+                  <a:srgbClr val="FFFF00"/>
+                </a:solidFill>
+                <a:latin typeface="Avenir Book" panose="02000503020000020003" pitchFamily="2" charset="0"/>
+              </a:rPr>
+              <a:t>                  D</a:t>
+            </a:r>
+            <a:endParaRPr lang="en-US" sz="3200" dirty="0">
+              <a:solidFill>
+                <a:schemeClr val="bg1"/>
+              </a:solidFill>
+              <a:latin typeface="Avenir Book" panose="02000503020000020003" pitchFamily="2" charset="0"/>
+            </a:endParaRPr>
+          </a:p>
+          <a:p>
+            <a:pPr algn="l"/>
+            <a:r>
+              <a:rPr lang="en-US" sz="3200" dirty="0">
+                <a:solidFill>
+                  <a:schemeClr val="bg1"/>
+                </a:solidFill>
+                <a:latin typeface="Avenir Book" panose="02000503020000020003" pitchFamily="2" charset="0"/>
+              </a:rPr>
+              <a:t>And in Your presence </a:t>
+            </a:r>
+          </a:p>
+          <a:p>
+            <a:pPr algn="l"/>
+            <a:r>
+              <a:rPr lang="en-US" sz="3200" dirty="0">
+                <a:solidFill>
+                  <a:srgbClr val="FFFF00"/>
+                </a:solidFill>
+                <a:latin typeface="Avenir Book" panose="02000503020000020003" pitchFamily="2" charset="0"/>
+              </a:rPr>
+              <a:t>           C                           G</a:t>
+            </a:r>
+          </a:p>
+          <a:p>
+            <a:pPr algn="l"/>
+            <a:r>
+              <a:rPr lang="en-US" sz="3200" dirty="0">
+                <a:solidFill>
+                  <a:schemeClr val="bg1"/>
+                </a:solidFill>
+                <a:latin typeface="Avenir Book" panose="02000503020000020003" pitchFamily="2" charset="0"/>
+              </a:rPr>
+              <a:t>All our fears are washed away</a:t>
+            </a:r>
+          </a:p>
+        </p:txBody>
+      </p:sp>
+    </p:spTree>
+    <p:extLst>
+      <p:ext uri="{BB962C8B-B14F-4D97-AF65-F5344CB8AC3E}">
+        <p14:creationId xmlns:p14="http://schemas.microsoft.com/office/powerpoint/2010/main" val="431289814"/>
       </p:ext>
     </p:extLst>
   </p:cSld>
